--- a/attached_assets/VaughnMartin-Investor-Deck-v11-fixed.pptx
+++ b/attached_assets/VaughnMartin-Investor-Deck-v11-fixed.pptx
@@ -3874,7 +3874,7 @@
             <a:avLst/>
           </a:prstGeom>
           <a:solidFill>
-            <a:srgbClr val="0A0F2E"/>
+            <a:srgbClr val="F8F7F4"/>
           </a:solidFill>
           <a:ln>
             <a:noFill/>
@@ -11653,7 +11653,7 @@
             <a:avLst/>
           </a:prstGeom>
           <a:solidFill>
-            <a:srgbClr val="0A0F2E"/>
+            <a:srgbClr val="F8F7F4"/>
           </a:solidFill>
           <a:ln>
             <a:noFill/>
@@ -14672,7 +14672,7 @@
             <a:avLst/>
           </a:prstGeom>
           <a:solidFill>
-            <a:srgbClr val="0A0F2E"/>
+            <a:srgbClr val="F8F7F4"/>
           </a:solidFill>
           <a:ln>
             <a:noFill/>
